--- a/Martes-09/S01_Martes-09_1_Carrusel_Que-es-visar_1x1.pptx
+++ b/Martes-09/S01_Martes-09_1_Carrusel_Que-es-visar_1x1.pptx
@@ -3397,7 +3397,7 @@
           <a:p>
             <a:pPr algn="l">
               <a:lnSpc>
-                <a:spcPct val="110000"/>
+                <a:spcPct val="115000"/>
               </a:lnSpc>
             </a:pPr>
             <a:r>
@@ -3702,7 +3702,7 @@
         </p:nvSpPr>
         <p:spPr>
           <a:xfrm>
-            <a:off x="777240" y="1280160"/>
+            <a:off x="777240" y="1367536"/>
             <a:ext cx="1371600" cy="146304"/>
           </a:xfrm>
           <a:prstGeom prst="rect">
@@ -3746,8 +3746,8 @@
         </p:nvSpPr>
         <p:spPr>
           <a:xfrm>
-            <a:off x="777240" y="1737360"/>
-            <a:ext cx="6675120" cy="4356608"/>
+            <a:off x="777240" y="1824736"/>
+            <a:ext cx="6675120" cy="3848608"/>
           </a:xfrm>
           <a:prstGeom prst="rect">
             <a:avLst/>
@@ -3766,13 +3766,13 @@
               </a:lnSpc>
             </a:pPr>
             <a:r>
-              <a:rPr sz="6400" b="1">
+              <a:rPr sz="5600" b="1">
                 <a:solidFill>
                   <a:srgbClr val="FFFFFF"/>
                 </a:solidFill>
                 <a:latin typeface="Inter"/>
               </a:rPr>
-              <a:t>Pronto, visar será cosa de horas.</a:t>
+              <a:t>En Notaly, visar es cosa de horas.</a:t>
             </a:r>
           </a:p>
         </p:txBody>
@@ -3785,8 +3785,8 @@
         </p:nvSpPr>
         <p:spPr>
           <a:xfrm>
-            <a:off x="777240" y="5877052"/>
-            <a:ext cx="6675120" cy="1118108"/>
+            <a:off x="777240" y="5464302"/>
+            <a:ext cx="6675120" cy="1530858"/>
           </a:xfrm>
           <a:prstGeom prst="rect">
             <a:avLst/>
@@ -3811,7 +3811,7 @@
                 </a:solidFill>
                 <a:latin typeface="Inter"/>
               </a:rPr>
-              <a:t>Síguenos para más derecho fácil.</a:t>
+              <a:t>Míralo en early access: notaly.com.ve</a:t>
             </a:r>
           </a:p>
         </p:txBody>

--- a/Martes-09/S01_Martes-09_1_Carrusel_Que-es-visar_1x1.pptx
+++ b/Martes-09/S01_Martes-09_1_Carrusel_Que-es-visar_1x1.pptx
@@ -3702,7 +3702,7 @@
         </p:nvSpPr>
         <p:spPr>
           <a:xfrm>
-            <a:off x="777240" y="1367536"/>
+            <a:off x="777240" y="1280160"/>
             <a:ext cx="1371600" cy="146304"/>
           </a:xfrm>
           <a:prstGeom prst="rect">
@@ -3746,8 +3746,8 @@
         </p:nvSpPr>
         <p:spPr>
           <a:xfrm>
-            <a:off x="777240" y="1824736"/>
-            <a:ext cx="6675120" cy="3848608"/>
+            <a:off x="777240" y="1737360"/>
+            <a:ext cx="6675120" cy="4356608"/>
           </a:xfrm>
           <a:prstGeom prst="rect">
             <a:avLst/>
@@ -3766,7 +3766,7 @@
               </a:lnSpc>
             </a:pPr>
             <a:r>
-              <a:rPr sz="5600" b="1">
+              <a:rPr sz="6400" b="1">
                 <a:solidFill>
                   <a:srgbClr val="FFFFFF"/>
                 </a:solidFill>
@@ -3785,8 +3785,8 @@
         </p:nvSpPr>
         <p:spPr>
           <a:xfrm>
-            <a:off x="777240" y="5464302"/>
-            <a:ext cx="6675120" cy="1530858"/>
+            <a:off x="777240" y="5877052"/>
+            <a:ext cx="6675120" cy="1118108"/>
           </a:xfrm>
           <a:prstGeom prst="rect">
             <a:avLst/>
@@ -3811,7 +3811,7 @@
                 </a:solidFill>
                 <a:latin typeface="Inter"/>
               </a:rPr>
-              <a:t>Míralo en early access: notaly.com.ve</a:t>
+              <a:t>Conócenos en notaly.com.ve</a:t>
             </a:r>
           </a:p>
         </p:txBody>
